--- a/docs/VIntelligence_Preemptive_Behavioral_Brief.pptx
+++ b/docs/VIntelligence_Preemptive_Behavioral_Brief.pptx
@@ -4431,7 +4431,7 @@
               </a:defRPr>
             </a:pPr>
             <a:r>
-              <a:t>Rank #24 / 250</a:t>
+              <a:t>Rank #30 / 250</a:t>
             </a:r>
           </a:p>
         </p:txBody>
@@ -4467,7 +4467,7 @@
               </a:defRPr>
             </a:pPr>
             <a:r>
-              <a:t>Tell: Breadth 11</a:t>
+              <a:t>Tell: Breadth 10</a:t>
             </a:r>
           </a:p>
         </p:txBody>
@@ -4735,7 +4735,7 @@
               </a:defRPr>
             </a:pPr>
             <a:r>
-              <a:t>Tell: Sustained 9.6 + Context 7.9</a:t>
+              <a:t>Tell: Sustained 9.6 + Context 8.1</a:t>
             </a:r>
           </a:p>
         </p:txBody>
@@ -4947,7 +4947,7 @@
               </a:defRPr>
             </a:pPr>
             <a:r>
-              <a:t>Attackers — lowest 13.7, average 32.7.</a:t>
+              <a:t>Attackers — lowest 12.9, average 32.7.</a:t>
             </a:r>
           </a:p>
           <a:p>
@@ -5235,7 +5235,7 @@
               </a:defRPr>
             </a:pPr>
             <a:r>
-              <a:t>4 / 4 detected at 8.1% false-positive (threat-profile detector: 0% FP) — versus 0 / 4 traditional and 1 / 4 z-score. Earlier detection = smaller blast radius.</a:t>
+              <a:t>4 / 4 detected at 10.6% false-positive (threat-profile detector: 0% FP) — versus 0 / 4 traditional and 1 / 4 z-score. Earlier detection = smaller blast radius.</a:t>
             </a:r>
           </a:p>
         </p:txBody>
@@ -5605,7 +5605,7 @@
               </a:defRPr>
             </a:pPr>
             <a:r>
-              <a:t>4 / 4 stealth campaigns detected at 8.1% FP (threat-profile detector: 0% FP) in blind test.</a:t>
+              <a:t>4 / 4 stealth campaigns detected at 10.6% FP (threat-profile detector: 0% FP) in blind test.</a:t>
             </a:r>
           </a:p>
           <a:p>
@@ -8979,7 +8979,7 @@
               </a:defRPr>
             </a:pPr>
             <a:r>
-              <a:t>Against four stealth campaigns (insider, slow APT, Volt Typhoon LoTL, Salt Typhoon telecom): traditional SIEM caught 0 of 4; z-score caught 1 of 4; V-Intelligence + composite scoring caught 4 of 4 at 8.1% false-positive (cleanly separating 2 of 4); the multi-front threat-profile detector caught 4 of 4 at 0% false-positive. Salt Typhoon (max z-score 1.71 — invisible to thresholds) ranked #1 of 250.</a:t>
+              <a:t>Against four stealth campaigns (insider, slow APT, Volt Typhoon LoTL, Salt Typhoon telecom): traditional SIEM caught 0 of 4; z-score caught 1 of 4; V-Intelligence + composite scoring caught 4 of 4 at 10.6% false-positive (cleanly separating 2 of 4); the multi-front threat-profile detector caught 4 of 4 at 0% false-positive. Salt Typhoon (max z-score 1.71 — invisible to thresholds) ranked #1 of 250.</a:t>
             </a:r>
           </a:p>
         </p:txBody>
@@ -14681,7 +14681,7 @@
               </a:defRPr>
             </a:pPr>
             <a:r>
-              <a:t>In feature space the four stealth attackers sit inside the normal band — undetectable. In V-Intelligence's semantic embedding space, all four separate from the population. Composite scoring then ranks them: insider #2, slow APT #7, Volt Typhoon LoTL #24, Salt Typhoon #1 — all at 8.1% false-positive, where traditional methods caught zero.</a:t>
+              <a:t>In feature space the four stealth attackers sit inside the normal band — undetectable. In V-Intelligence's semantic embedding space, all four separate from the population. Composite scoring then ranks them: insider #2, slow APT #7, Volt Typhoon LoTL #30, Salt Typhoon #1 — all at 10.6% false-positive, where traditional methods caught zero.</a:t>
             </a:r>
           </a:p>
         </p:txBody>
